--- a/classes/parte-6-analisis-de-malware/157-threat-intelligence-a-partir-de-malware/clase-157-presentacion.pptx
+++ b/classes/parte-6-analisis-de-malware/157-threat-intelligence-a-partir-de-malware/clase-157-presentacion.pptx
@@ -17,6 +17,9 @@
     <p:sldId id="265" r:id="rId16"/>
     <p:sldId id="266" r:id="rId17"/>
     <p:sldId id="267" r:id="rId18"/>
+    <p:sldId id="268" r:id="rId19"/>
+    <p:sldId id="269" r:id="rId20"/>
+    <p:sldId id="270" r:id="rId21"/>
   </p:sldIdLst>
   <p:sldSz cx="9144000" cy="6858000" type="screen4x3"/>
   <p:notesSz cx="6858000" cy="9144000"/>
@@ -3198,7 +3201,7 @@
                   <a:srgbClr val="0B3D2E"/>
                 </a:solidFill>
               </a:rPr>
-              <a:t>⚠️ Errores comunes</a:t>
+              <a:t>✍️ Ejercicios</a:t>
             </a:r>
           </a:p>
         </p:txBody>
@@ -3236,67 +3239,82 @@
                   <a:srgbClr val="22282E"/>
                 </a:solidFill>
               </a:rPr>
-              <a:t>•  Solo compartir hashes/IPs — Son volátiles; añade TTPs, más duraderos</a:t>
-            </a:r>
-          </a:p>
-          <a:p>
-            <a:pPr>
-              <a:spcAft>
-                <a:spcPts val="600"/>
-              </a:spcAft>
-            </a:pPr>
-            <a:r>
-              <a:rPr sz="1500">
-                <a:solidFill>
-                  <a:srgbClr val="22282E"/>
-                </a:solidFill>
-              </a:rPr>
-              <a:t>•  Atribución categórica — Usa hipótesis y niveles de confianza; evita saltar a conclusiones</a:t>
-            </a:r>
-          </a:p>
-          <a:p>
-            <a:pPr>
-              <a:spcAft>
-                <a:spcPts val="600"/>
-              </a:spcAft>
-            </a:pPr>
-            <a:r>
-              <a:rPr sz="1500">
-                <a:solidFill>
-                  <a:srgbClr val="22282E"/>
-                </a:solidFill>
-              </a:rPr>
-              <a:t>•  Pivoteo sin verificar — Correlaciona varias fuentes antes de afirmar relación</a:t>
-            </a:r>
-          </a:p>
-          <a:p>
-            <a:pPr>
-              <a:spcAft>
-                <a:spcPts val="600"/>
-              </a:spcAft>
-            </a:pPr>
-            <a:r>
-              <a:rPr sz="1500">
-                <a:solidFill>
-                  <a:srgbClr val="22282E"/>
-                </a:solidFill>
-              </a:rPr>
-              <a:t>•  IOCs sin contexto — Añade fechas, TLP y origen para que sean útiles</a:t>
-            </a:r>
-          </a:p>
-          <a:p>
-            <a:pPr>
-              <a:spcAft>
-                <a:spcPts val="600"/>
-              </a:spcAft>
-            </a:pPr>
-            <a:r>
-              <a:rPr sz="1500">
-                <a:solidFill>
-                  <a:srgbClr val="22282E"/>
-                </a:solidFill>
-              </a:rPr>
-              <a:t>•  Exponer datos de víctimas — Anonimiza y respeta TLP al compartir</a:t>
+              <a:t>•  Ordena 8 IOCs en la Pyramid of Pain y justifica.</a:t>
+            </a:r>
+          </a:p>
+          <a:p>
+            <a:pPr>
+              <a:spcAft>
+                <a:spcPts val="600"/>
+              </a:spcAft>
+            </a:pPr>
+            <a:r>
+              <a:rPr sz="1500">
+                <a:solidFill>
+                  <a:srgbClr val="22282E"/>
+                </a:solidFill>
+              </a:rPr>
+              <a:t>•  Pivotea de un dominio a muestras relacionadas y documenta el grafo.</a:t>
+            </a:r>
+          </a:p>
+          <a:p>
+            <a:pPr>
+              <a:spcAft>
+                <a:spcPts val="600"/>
+              </a:spcAft>
+            </a:pPr>
+            <a:r>
+              <a:rPr sz="1500">
+                <a:solidFill>
+                  <a:srgbClr val="22282E"/>
+                </a:solidFill>
+              </a:rPr>
+              <a:t>•  Rellena un Diamond Model de un caso real.</a:t>
+            </a:r>
+          </a:p>
+          <a:p>
+            <a:pPr>
+              <a:spcAft>
+                <a:spcPts val="600"/>
+              </a:spcAft>
+            </a:pPr>
+            <a:r>
+              <a:rPr sz="1500">
+                <a:solidFill>
+                  <a:srgbClr val="22282E"/>
+                </a:solidFill>
+              </a:rPr>
+              <a:t>•  Exporta una capa de ATT&amp;CK Navigator para una familia.</a:t>
+            </a:r>
+          </a:p>
+          <a:p>
+            <a:pPr>
+              <a:spcAft>
+                <a:spcPts val="600"/>
+              </a:spcAft>
+            </a:pPr>
+            <a:r>
+              <a:rPr sz="1500">
+                <a:solidFill>
+                  <a:srgbClr val="22282E"/>
+                </a:solidFill>
+              </a:rPr>
+              <a:t>•  Crea un evento MISP con IOCs, TTPs y TLP.</a:t>
+            </a:r>
+          </a:p>
+          <a:p>
+            <a:pPr>
+              <a:spcAft>
+                <a:spcPts val="600"/>
+              </a:spcAft>
+            </a:pPr>
+            <a:r>
+              <a:rPr sz="1500">
+                <a:solidFill>
+                  <a:srgbClr val="22282E"/>
+                </a:solidFill>
+              </a:rPr>
+              <a:t>•  Redacta una hipótesis de atribución con confianza calibrada.</a:t>
             </a:r>
           </a:p>
         </p:txBody>
@@ -3347,7 +3365,7 @@
                   <a:srgbClr val="0B3D2E"/>
                 </a:solidFill>
               </a:rPr>
-              <a:t>❓ Preguntas frecuentes</a:t>
+              <a:t>📝 Reto verificable</a:t>
             </a:r>
           </a:p>
         </p:txBody>
@@ -3385,37 +3403,22 @@
                   <a:srgbClr val="22282E"/>
                 </a:solidFill>
               </a:rPr>
-              <a:t>•  ❓ ¿Por qué priorizar TTPs sobre IOCs? Porque el atacante cambia hashes e IPs con facilidad, pero modificar sus técnicas es costoso; detectar TTPs es más resiliente.</a:t>
-            </a:r>
-          </a:p>
-          <a:p>
-            <a:pPr>
-              <a:spcAft>
-                <a:spcPts val="600"/>
-              </a:spcAft>
-            </a:pPr>
-            <a:r>
-              <a:rPr sz="1500">
-                <a:solidFill>
-                  <a:srgbClr val="22282E"/>
-                </a:solidFill>
-              </a:rPr>
-              <a:t>•  ❓ ¿La atribución es fiable? Es difícil y manipulable (false flags). Se maneja como hipótesis con niveles de confianza, no como certeza.</a:t>
-            </a:r>
-          </a:p>
-          <a:p>
-            <a:pPr>
-              <a:spcAft>
-                <a:spcPts val="600"/>
-              </a:spcAft>
-            </a:pPr>
-            <a:r>
-              <a:rPr sz="1500">
-                <a:solidFill>
-                  <a:srgbClr val="22282E"/>
-                </a:solidFill>
-              </a:rPr>
-              <a:t>•  ❓ ¿Qué es TLP? El Traffic Light Protocol clasifica cómo puede compartirse la información (RED/AMBER/GREEN/CLEAR) para proteger fuentes y víctimas.</a:t>
+              <a:t>•  A partir de una muestra, entrega un paquete de inteligencia: IOCs clasificados por la pirámide, capa ATT&amp;CK, grafo de pivoteo con al menos 2 relaciones nuevas y una evaluación de atribución con nivel…</a:t>
+            </a:r>
+          </a:p>
+          <a:p>
+            <a:pPr>
+              <a:spcAft>
+                <a:spcPts val="600"/>
+              </a:spcAft>
+            </a:pPr>
+            <a:r>
+              <a:rPr sz="1500">
+                <a:solidFill>
+                  <a:srgbClr val="22282E"/>
+                </a:solidFill>
+              </a:rPr>
+              <a:t>•  Criterio de aceptación: el paquete incluye al menos dos artefactos relacionados descubiertos por pivoteo (no presentes en la muestra inicial) y una atribución con confianza explícita y evidencia, no…</a:t>
             </a:r>
           </a:p>
         </p:txBody>
@@ -3466,7 +3469,7 @@
                   <a:srgbClr val="0B3D2E"/>
                 </a:solidFill>
               </a:rPr>
-              <a:t>🔗 Referencias</a:t>
+              <a:t>⚠️ Errores comunes</a:t>
             </a:r>
           </a:p>
         </p:txBody>
@@ -3504,6 +3507,274 @@
                   <a:srgbClr val="22282E"/>
                 </a:solidFill>
               </a:rPr>
+              <a:t>•  Solo compartir hashes/IPs — Son volátiles; añade TTPs, más duraderos</a:t>
+            </a:r>
+          </a:p>
+          <a:p>
+            <a:pPr>
+              <a:spcAft>
+                <a:spcPts val="600"/>
+              </a:spcAft>
+            </a:pPr>
+            <a:r>
+              <a:rPr sz="1500">
+                <a:solidFill>
+                  <a:srgbClr val="22282E"/>
+                </a:solidFill>
+              </a:rPr>
+              <a:t>•  Atribución categórica — Usa hipótesis y niveles de confianza; evita saltar a conclusiones</a:t>
+            </a:r>
+          </a:p>
+          <a:p>
+            <a:pPr>
+              <a:spcAft>
+                <a:spcPts val="600"/>
+              </a:spcAft>
+            </a:pPr>
+            <a:r>
+              <a:rPr sz="1500">
+                <a:solidFill>
+                  <a:srgbClr val="22282E"/>
+                </a:solidFill>
+              </a:rPr>
+              <a:t>•  Pivoteo sin verificar — Correlaciona varias fuentes antes de afirmar relación</a:t>
+            </a:r>
+          </a:p>
+          <a:p>
+            <a:pPr>
+              <a:spcAft>
+                <a:spcPts val="600"/>
+              </a:spcAft>
+            </a:pPr>
+            <a:r>
+              <a:rPr sz="1500">
+                <a:solidFill>
+                  <a:srgbClr val="22282E"/>
+                </a:solidFill>
+              </a:rPr>
+              <a:t>•  IOCs sin contexto — Añade fechas, TLP y origen para que sean útiles</a:t>
+            </a:r>
+          </a:p>
+          <a:p>
+            <a:pPr>
+              <a:spcAft>
+                <a:spcPts val="600"/>
+              </a:spcAft>
+            </a:pPr>
+            <a:r>
+              <a:rPr sz="1500">
+                <a:solidFill>
+                  <a:srgbClr val="22282E"/>
+                </a:solidFill>
+              </a:rPr>
+              <a:t>•  Exponer datos de víctimas — Anonimiza y respeta TLP al compartir</a:t>
+            </a:r>
+          </a:p>
+        </p:txBody>
+      </p:sp>
+    </p:spTree>
+  </p:cSld>
+  <p:clrMapOvr>
+    <a:masterClrMapping/>
+  </p:clrMapOvr>
+</p:sld>
+</file>
+
+<file path=ppt/slides/slide13.xml><?xml version="1.0" encoding="utf-8"?>
+<p:sld xmlns:a="http://schemas.openxmlformats.org/drawingml/2006/main" xmlns:p="http://schemas.openxmlformats.org/presentationml/2006/main" xmlns:r="http://schemas.openxmlformats.org/officeDocument/2006/relationships">
+  <p:cSld>
+    <p:spTree>
+      <p:nvGrpSpPr>
+        <p:cNvPr id="1" name=""/>
+        <p:cNvGrpSpPr/>
+        <p:nvPr/>
+      </p:nvGrpSpPr>
+      <p:grpSpPr/>
+      <p:sp>
+        <p:nvSpPr>
+          <p:cNvPr id="2" name="TextBox 1"/>
+          <p:cNvSpPr txBox="1"/>
+          <p:nvPr/>
+        </p:nvSpPr>
+        <p:spPr>
+          <a:xfrm>
+            <a:off x="457200" y="320040"/>
+            <a:ext cx="8229600" cy="822960"/>
+          </a:xfrm>
+          <a:prstGeom prst="rect">
+            <a:avLst/>
+          </a:prstGeom>
+          <a:noFill/>
+        </p:spPr>
+        <p:txBody>
+          <a:bodyPr wrap="square">
+            <a:spAutoFit/>
+          </a:bodyPr>
+          <a:lstStyle/>
+          <a:p>
+            <a:r>
+              <a:rPr sz="2600" b="1">
+                <a:solidFill>
+                  <a:srgbClr val="0B3D2E"/>
+                </a:solidFill>
+              </a:rPr>
+              <a:t>❓ Preguntas frecuentes</a:t>
+            </a:r>
+          </a:p>
+        </p:txBody>
+      </p:sp>
+      <p:sp>
+        <p:nvSpPr>
+          <p:cNvPr id="3" name="TextBox 2"/>
+          <p:cNvSpPr txBox="1"/>
+          <p:nvPr/>
+        </p:nvSpPr>
+        <p:spPr>
+          <a:xfrm>
+            <a:off x="457200" y="1280160"/>
+            <a:ext cx="8229600" cy="4937760"/>
+          </a:xfrm>
+          <a:prstGeom prst="rect">
+            <a:avLst/>
+          </a:prstGeom>
+          <a:noFill/>
+        </p:spPr>
+        <p:txBody>
+          <a:bodyPr wrap="square">
+            <a:spAutoFit/>
+          </a:bodyPr>
+          <a:lstStyle/>
+          <a:p>
+            <a:pPr>
+              <a:spcAft>
+                <a:spcPts val="600"/>
+              </a:spcAft>
+            </a:pPr>
+            <a:r>
+              <a:rPr sz="1500">
+                <a:solidFill>
+                  <a:srgbClr val="22282E"/>
+                </a:solidFill>
+              </a:rPr>
+              <a:t>•  ❓ ¿Por qué priorizar TTPs sobre IOCs? Porque el atacante cambia hashes e IPs con facilidad, pero modificar sus técnicas es costoso; detectar TTPs es más resiliente.</a:t>
+            </a:r>
+          </a:p>
+          <a:p>
+            <a:pPr>
+              <a:spcAft>
+                <a:spcPts val="600"/>
+              </a:spcAft>
+            </a:pPr>
+            <a:r>
+              <a:rPr sz="1500">
+                <a:solidFill>
+                  <a:srgbClr val="22282E"/>
+                </a:solidFill>
+              </a:rPr>
+              <a:t>•  ❓ ¿La atribución es fiable? Es difícil y manipulable (false flags). Se maneja como hipótesis con niveles de confianza, no como certeza.</a:t>
+            </a:r>
+          </a:p>
+          <a:p>
+            <a:pPr>
+              <a:spcAft>
+                <a:spcPts val="600"/>
+              </a:spcAft>
+            </a:pPr>
+            <a:r>
+              <a:rPr sz="1500">
+                <a:solidFill>
+                  <a:srgbClr val="22282E"/>
+                </a:solidFill>
+              </a:rPr>
+              <a:t>•  ❓ ¿Qué es TLP? El Traffic Light Protocol clasifica cómo puede compartirse la información (RED/AMBER/GREEN/CLEAR) para proteger fuentes y víctimas.</a:t>
+            </a:r>
+          </a:p>
+        </p:txBody>
+      </p:sp>
+    </p:spTree>
+  </p:cSld>
+  <p:clrMapOvr>
+    <a:masterClrMapping/>
+  </p:clrMapOvr>
+</p:sld>
+</file>
+
+<file path=ppt/slides/slide14.xml><?xml version="1.0" encoding="utf-8"?>
+<p:sld xmlns:a="http://schemas.openxmlformats.org/drawingml/2006/main" xmlns:p="http://schemas.openxmlformats.org/presentationml/2006/main" xmlns:r="http://schemas.openxmlformats.org/officeDocument/2006/relationships">
+  <p:cSld>
+    <p:spTree>
+      <p:nvGrpSpPr>
+        <p:cNvPr id="1" name=""/>
+        <p:cNvGrpSpPr/>
+        <p:nvPr/>
+      </p:nvGrpSpPr>
+      <p:grpSpPr/>
+      <p:sp>
+        <p:nvSpPr>
+          <p:cNvPr id="2" name="TextBox 1"/>
+          <p:cNvSpPr txBox="1"/>
+          <p:nvPr/>
+        </p:nvSpPr>
+        <p:spPr>
+          <a:xfrm>
+            <a:off x="457200" y="320040"/>
+            <a:ext cx="8229600" cy="822960"/>
+          </a:xfrm>
+          <a:prstGeom prst="rect">
+            <a:avLst/>
+          </a:prstGeom>
+          <a:noFill/>
+        </p:spPr>
+        <p:txBody>
+          <a:bodyPr wrap="square">
+            <a:spAutoFit/>
+          </a:bodyPr>
+          <a:lstStyle/>
+          <a:p>
+            <a:r>
+              <a:rPr sz="2600" b="1">
+                <a:solidFill>
+                  <a:srgbClr val="0B3D2E"/>
+                </a:solidFill>
+              </a:rPr>
+              <a:t>🔗 Referencias</a:t>
+            </a:r>
+          </a:p>
+        </p:txBody>
+      </p:sp>
+      <p:sp>
+        <p:nvSpPr>
+          <p:cNvPr id="3" name="TextBox 2"/>
+          <p:cNvSpPr txBox="1"/>
+          <p:nvPr/>
+        </p:nvSpPr>
+        <p:spPr>
+          <a:xfrm>
+            <a:off x="457200" y="1280160"/>
+            <a:ext cx="8229600" cy="4937760"/>
+          </a:xfrm>
+          <a:prstGeom prst="rect">
+            <a:avLst/>
+          </a:prstGeom>
+          <a:noFill/>
+        </p:spPr>
+        <p:txBody>
+          <a:bodyPr wrap="square">
+            <a:spAutoFit/>
+          </a:bodyPr>
+          <a:lstStyle/>
+          <a:p>
+            <a:pPr>
+              <a:spcAft>
+                <a:spcPts val="600"/>
+              </a:spcAft>
+            </a:pPr>
+            <a:r>
+              <a:rPr sz="1500">
+                <a:solidFill>
+                  <a:srgbClr val="22282E"/>
+                </a:solidFill>
+              </a:rPr>
               <a:t>•  Bianco, D. — Pyramid of Pain. &lt;https://detect-respond.blogspot.com/2013/03/the-pyramid-of-pain.html&gt;</a:t>
             </a:r>
           </a:p>
@@ -3569,6 +3840,81 @@
           </a:p>
         </p:txBody>
       </p:sp>
+    </p:spTree>
+  </p:cSld>
+  <p:clrMapOvr>
+    <a:masterClrMapping/>
+  </p:clrMapOvr>
+</p:sld>
+</file>
+
+<file path=ppt/slides/slide15.xml><?xml version="1.0" encoding="utf-8"?>
+<p:sld xmlns:a="http://schemas.openxmlformats.org/drawingml/2006/main" xmlns:p="http://schemas.openxmlformats.org/presentationml/2006/main" xmlns:r="http://schemas.openxmlformats.org/officeDocument/2006/relationships">
+  <p:cSld>
+    <p:spTree>
+      <p:nvGrpSpPr>
+        <p:cNvPr id="1" name=""/>
+        <p:cNvGrpSpPr/>
+        <p:nvPr/>
+      </p:nvGrpSpPr>
+      <p:grpSpPr/>
+      <p:sp>
+        <p:nvSpPr>
+          <p:cNvPr id="2" name="TextBox 1"/>
+          <p:cNvSpPr txBox="1"/>
+          <p:nvPr/>
+        </p:nvSpPr>
+        <p:spPr>
+          <a:xfrm>
+            <a:off x="457200" y="274320"/>
+            <a:ext cx="8229600" cy="640080"/>
+          </a:xfrm>
+          <a:prstGeom prst="rect">
+            <a:avLst/>
+          </a:prstGeom>
+          <a:noFill/>
+        </p:spPr>
+        <p:txBody>
+          <a:bodyPr wrap="square">
+            <a:spAutoFit/>
+          </a:bodyPr>
+          <a:lstStyle/>
+          <a:p>
+            <a:r>
+              <a:rPr sz="2200" b="1">
+                <a:solidFill>
+                  <a:srgbClr val="0B3D2E"/>
+                </a:solidFill>
+              </a:rPr>
+              <a:t>Diagrama de la clase</a:t>
+            </a:r>
+          </a:p>
+        </p:txBody>
+      </p:sp>
+      <p:pic>
+        <p:nvPicPr>
+          <p:cNvPr id="3" name="Picture 2" descr="aa3ee9ae90bd4c12.png"/>
+          <p:cNvPicPr>
+            <a:picLocks noChangeAspect="1"/>
+          </p:cNvPicPr>
+          <p:nvPr/>
+        </p:nvPicPr>
+        <p:blipFill>
+          <a:blip r:embed="rId2"/>
+          <a:stretch>
+            <a:fillRect/>
+          </a:stretch>
+        </p:blipFill>
+        <p:spPr>
+          <a:xfrm>
+            <a:off x="3636085" y="1097280"/>
+            <a:ext cx="1871830" cy="5303520"/>
+          </a:xfrm>
+          <a:prstGeom prst="rect">
+            <a:avLst/>
+          </a:prstGeom>
+        </p:spPr>
+      </p:pic>
     </p:spTree>
   </p:cSld>
   <p:clrMapOvr>
@@ -3653,7 +3999,7 @@
                   <a:srgbClr val="22282E"/>
                 </a:solidFill>
               </a:rPr>
-              <a:t>•  Transformar el análisis de una muestra en inteligencia accionable: IOCs estructurados, TTPs mapeados, pivoteo hacia infraestructura y campañas relacionadas, y atribución razonada. El alumno aprenderá a usar la Pyramid of Pain, marcos como Diamond Model y ATT&amp;CK, y a producir inteligencia que otros equipos puedan consumir (STIX, MISP).</a:t>
+              <a:t>•  Transformar el análisis de una muestra en inteligencia accionable: IOCs estructurados, TTPs mapeados, pivoteo hacia infraestructura y campañas relacionadas, y atribución razonada. El alumno aprenderá…</a:t>
             </a:r>
           </a:p>
         </p:txBody>
@@ -4047,7 +4393,7 @@
                   <a:srgbClr val="0B3D2E"/>
                 </a:solidFill>
               </a:rPr>
-              <a:t>📖 Definiciones y características</a:t>
+              <a:t>🧠 Explicación en profundidad</a:t>
             </a:r>
           </a:p>
         </p:txBody>
@@ -4085,67 +4431,97 @@
                   <a:srgbClr val="22282E"/>
                 </a:solidFill>
               </a:rPr>
-              <a:t>•  IOC: artefacto observable (hash, IP, dominio). Característica clave: fácil de cambiar para el atacante (base de la pirámide).</a:t>
-            </a:r>
-          </a:p>
-          <a:p>
-            <a:pPr>
-              <a:spcAft>
-                <a:spcPts val="600"/>
-              </a:spcAft>
-            </a:pPr>
-            <a:r>
-              <a:rPr sz="1500">
-                <a:solidFill>
-                  <a:srgbClr val="22282E"/>
-                </a:solidFill>
-              </a:rPr>
-              <a:t>•  TTP: comportamiento del adversario. Característica clave: caro de cambiar (cima de la pirámide).</a:t>
-            </a:r>
-          </a:p>
-          <a:p>
-            <a:pPr>
-              <a:spcAft>
-                <a:spcPts val="600"/>
-              </a:spcAft>
-            </a:pPr>
-            <a:r>
-              <a:rPr sz="1500">
-                <a:solidFill>
-                  <a:srgbClr val="22282E"/>
-                </a:solidFill>
-              </a:rPr>
-              <a:t>•  Pyramid of Pain (Bianco): jerarquía de indicadores por "dolor" al atacante. Característica clave: prioriza detección.</a:t>
-            </a:r>
-          </a:p>
-          <a:p>
-            <a:pPr>
-              <a:spcAft>
-                <a:spcPts val="600"/>
-              </a:spcAft>
-            </a:pPr>
-            <a:r>
-              <a:rPr sz="1500">
-                <a:solidFill>
-                  <a:srgbClr val="22282E"/>
-                </a:solidFill>
-              </a:rPr>
-              <a:t>•  Diamond Model: modelo de eventos de intrusión. Característica clave: relaciona 4 vértices.</a:t>
-            </a:r>
-          </a:p>
-          <a:p>
-            <a:pPr>
-              <a:spcAft>
-                <a:spcPts val="600"/>
-              </a:spcAft>
-            </a:pPr>
-            <a:r>
-              <a:rPr sz="1500">
-                <a:solidFill>
-                  <a:srgbClr val="22282E"/>
-                </a:solidFill>
-              </a:rPr>
-              <a:t>•  STIX: lenguaje estructurado para CTI. Característica clave: interoperabilidad.</a:t>
+              <a:t>•  La inteligencia de amenazas (threat intelligence, CTI) convierte el análisis de malware individual</a:t>
+            </a:r>
+          </a:p>
+          <a:p>
+            <a:pPr>
+              <a:spcAft>
+                <a:spcPts val="600"/>
+              </a:spcAft>
+            </a:pPr>
+            <a:r>
+              <a:rPr sz="1500">
+                <a:solidFill>
+                  <a:srgbClr val="22282E"/>
+                </a:solidFill>
+              </a:rPr>
+              <a:t>•  en conocimiento accionable sobre los adversarios: quiénes son, cómo operan, qué infraestructura usan,</a:t>
+            </a:r>
+          </a:p>
+          <a:p>
+            <a:pPr>
+              <a:spcAft>
+                <a:spcPts val="600"/>
+              </a:spcAft>
+            </a:pPr>
+            <a:r>
+              <a:rPr sz="1500">
+                <a:solidFill>
+                  <a:srgbClr val="22282E"/>
+                </a:solidFill>
+              </a:rPr>
+              <a:t>•  a quién atacan. Es el paso de "esta muestra hace X" a "el grupo Y usa esta técnica contra el sector Z, y</a:t>
+            </a:r>
+          </a:p>
+          <a:p>
+            <a:pPr>
+              <a:spcAft>
+                <a:spcPts val="600"/>
+              </a:spcAft>
+            </a:pPr>
+            <a:r>
+              <a:rPr sz="1500">
+                <a:solidFill>
+                  <a:srgbClr val="22282E"/>
+                </a:solidFill>
+              </a:rPr>
+              <a:t>•  así se detecta y se anticipa". La CTI es lo que da propósito estratégico al análisis: no se analiza</a:t>
+            </a:r>
+          </a:p>
+          <a:p>
+            <a:pPr>
+              <a:spcAft>
+                <a:spcPts val="600"/>
+              </a:spcAft>
+            </a:pPr>
+            <a:r>
+              <a:rPr sz="1500">
+                <a:solidFill>
+                  <a:srgbClr val="22282E"/>
+                </a:solidFill>
+              </a:rPr>
+              <a:t>•  malware por curiosidad, sino para defender mejor, y para eso hay que transformar los datos técnicos en</a:t>
+            </a:r>
+          </a:p>
+          <a:p>
+            <a:pPr>
+              <a:spcAft>
+                <a:spcPts val="600"/>
+              </a:spcAft>
+            </a:pPr>
+            <a:r>
+              <a:rPr sz="1500">
+                <a:solidFill>
+                  <a:srgbClr val="22282E"/>
+                </a:solidFill>
+              </a:rPr>
+              <a:t>•  inteligencia que informe decisiones.</a:t>
+            </a:r>
+          </a:p>
+          <a:p>
+            <a:pPr>
+              <a:spcAft>
+                <a:spcPts val="600"/>
+              </a:spcAft>
+            </a:pPr>
+            <a:r>
+              <a:rPr sz="1500">
+                <a:solidFill>
+                  <a:srgbClr val="22282E"/>
+                </a:solidFill>
+              </a:rPr>
+              <a:t>•  La jerarquía fundamental es dato → información → inteligencia. Un dato es un hecho aislado (una IP,</a:t>
             </a:r>
           </a:p>
         </p:txBody>
@@ -4196,7 +4572,7 @@
                   <a:srgbClr val="0B3D2E"/>
                 </a:solidFill>
               </a:rPr>
-              <a:t>🧰 Herramientas y preparación</a:t>
+              <a:t>📖 Definiciones y características</a:t>
             </a:r>
           </a:p>
         </p:txBody>
@@ -4234,52 +4610,67 @@
                   <a:srgbClr val="22282E"/>
                 </a:solidFill>
               </a:rPr>
-              <a:t>•  VirusTotal (pivoteo), MalwareBazaar, URLhaus, ThreatFox (abuse.ch).</a:t>
-            </a:r>
-          </a:p>
-          <a:p>
-            <a:pPr>
-              <a:spcAft>
-                <a:spcPts val="600"/>
-              </a:spcAft>
-            </a:pPr>
-            <a:r>
-              <a:rPr sz="1500">
-                <a:solidFill>
-                  <a:srgbClr val="22282E"/>
-                </a:solidFill>
-              </a:rPr>
-              <a:t>•  MISP para almacenar y compartir; STIX2 (Python) para estructurar.</a:t>
-            </a:r>
-          </a:p>
-          <a:p>
-            <a:pPr>
-              <a:spcAft>
-                <a:spcPts val="600"/>
-              </a:spcAft>
-            </a:pPr>
-            <a:r>
-              <a:rPr sz="1500">
-                <a:solidFill>
-                  <a:srgbClr val="22282E"/>
-                </a:solidFill>
-              </a:rPr>
-              <a:t>•  MITRE ATT&amp;CK Navigator para mapear TTPs.</a:t>
-            </a:r>
-          </a:p>
-          <a:p>
-            <a:pPr>
-              <a:spcAft>
-                <a:spcPts val="600"/>
-              </a:spcAft>
-            </a:pPr>
-            <a:r>
-              <a:rPr sz="1500">
-                <a:solidFill>
-                  <a:srgbClr val="22282E"/>
-                </a:solidFill>
-              </a:rPr>
-              <a:t>•  Passive DNS / WHOIS para pivoteo de infraestructura.</a:t>
+              <a:t>•  IOC: artefacto observable (hash, IP, dominio). Característica clave: fácil de cambiar para el atacante (base de la pirámide).</a:t>
+            </a:r>
+          </a:p>
+          <a:p>
+            <a:pPr>
+              <a:spcAft>
+                <a:spcPts val="600"/>
+              </a:spcAft>
+            </a:pPr>
+            <a:r>
+              <a:rPr sz="1500">
+                <a:solidFill>
+                  <a:srgbClr val="22282E"/>
+                </a:solidFill>
+              </a:rPr>
+              <a:t>•  TTP: comportamiento del adversario. Característica clave: caro de cambiar (cima de la pirámide).</a:t>
+            </a:r>
+          </a:p>
+          <a:p>
+            <a:pPr>
+              <a:spcAft>
+                <a:spcPts val="600"/>
+              </a:spcAft>
+            </a:pPr>
+            <a:r>
+              <a:rPr sz="1500">
+                <a:solidFill>
+                  <a:srgbClr val="22282E"/>
+                </a:solidFill>
+              </a:rPr>
+              <a:t>•  Pyramid of Pain (Bianco): jerarquía de indicadores por "dolor" al atacante. Característica clave: prioriza detección.</a:t>
+            </a:r>
+          </a:p>
+          <a:p>
+            <a:pPr>
+              <a:spcAft>
+                <a:spcPts val="600"/>
+              </a:spcAft>
+            </a:pPr>
+            <a:r>
+              <a:rPr sz="1500">
+                <a:solidFill>
+                  <a:srgbClr val="22282E"/>
+                </a:solidFill>
+              </a:rPr>
+              <a:t>•  Diamond Model: modelo de eventos de intrusión. Característica clave: relaciona 4 vértices.</a:t>
+            </a:r>
+          </a:p>
+          <a:p>
+            <a:pPr>
+              <a:spcAft>
+                <a:spcPts val="600"/>
+              </a:spcAft>
+            </a:pPr>
+            <a:r>
+              <a:rPr sz="1500">
+                <a:solidFill>
+                  <a:srgbClr val="22282E"/>
+                </a:solidFill>
+              </a:rPr>
+              <a:t>•  STIX: lenguaje estructurado para CTI. Característica clave: interoperabilidad.</a:t>
             </a:r>
           </a:p>
         </p:txBody>
@@ -4330,7 +4721,7 @@
                   <a:srgbClr val="0B3D2E"/>
                 </a:solidFill>
               </a:rPr>
-              <a:t>🧪 Laboratorio guiado</a:t>
+              <a:t>📔 Glosario</a:t>
             </a:r>
           </a:p>
         </p:txBody>
@@ -4368,97 +4759,97 @@
                   <a:srgbClr val="22282E"/>
                 </a:solidFill>
               </a:rPr>
-              <a:t>•  Parte de una muestra ya analizada. Reúne sus IOCs: hashes, dominios/IPs C2, mutex, rutas, certificados TLS.</a:t>
-            </a:r>
-          </a:p>
-          <a:p>
-            <a:pPr>
-              <a:spcAft>
-                <a:spcPts val="600"/>
-              </a:spcAft>
-            </a:pPr>
-            <a:r>
-              <a:rPr sz="1500">
-                <a:solidFill>
-                  <a:srgbClr val="22282E"/>
-                </a:solidFill>
-              </a:rPr>
-              <a:t>•  Clasifícalos con la Pyramid of Pain y anota cuáles son volátiles (hash/IP) y cuáles duraderos (TTPs, herramientas).</a:t>
-            </a:r>
-          </a:p>
-          <a:p>
-            <a:pPr>
-              <a:spcAft>
-                <a:spcPts val="600"/>
-              </a:spcAft>
-            </a:pPr>
-            <a:r>
-              <a:rPr sz="1500">
-                <a:solidFill>
-                  <a:srgbClr val="22282E"/>
-                </a:solidFill>
-              </a:rPr>
-              <a:t>•  Pivotea en VirusTotal/ThreatFox: desde un dominio C2 encuentra otras muestras que lo contactan; desde un imphash halla binarios similares. Documenta las relaciones.</a:t>
-            </a:r>
-          </a:p>
-          <a:p>
-            <a:pPr>
-              <a:spcAft>
-                <a:spcPts val="600"/>
-              </a:spcAft>
-            </a:pPr>
-            <a:r>
-              <a:rPr sz="1500">
-                <a:solidFill>
-                  <a:srgbClr val="22282E"/>
-                </a:solidFill>
-              </a:rPr>
-              <a:t>•  Usa passive DNS/WHOIS para expandir la infraestructura (dominios hermanos, ASN, patrones de registro).</a:t>
-            </a:r>
-          </a:p>
-          <a:p>
-            <a:pPr>
-              <a:spcAft>
-                <a:spcPts val="600"/>
-              </a:spcAft>
-            </a:pPr>
-            <a:r>
-              <a:rPr sz="1500">
-                <a:solidFill>
-                  <a:srgbClr val="22282E"/>
-                </a:solidFill>
-              </a:rPr>
-              <a:t>•  Construye un Diamond Model del evento: adversario (hipótesis), infraestructura, capacidad (la muestra), víctima.</a:t>
-            </a:r>
-          </a:p>
-          <a:p>
-            <a:pPr>
-              <a:spcAft>
-                <a:spcPts val="600"/>
-              </a:spcAft>
-            </a:pPr>
-            <a:r>
-              <a:rPr sz="1500">
-                <a:solidFill>
-                  <a:srgbClr val="22282E"/>
-                </a:solidFill>
-              </a:rPr>
-              <a:t>•  Mapea las TTPs al ATT&amp;CK Navigator y exporta la capa.</a:t>
-            </a:r>
-          </a:p>
-          <a:p>
-            <a:pPr>
-              <a:spcAft>
-                <a:spcPts val="600"/>
-              </a:spcAft>
-            </a:pPr>
-            <a:r>
-              <a:rPr sz="1500">
-                <a:solidFill>
-                  <a:srgbClr val="22282E"/>
-                </a:solidFill>
-              </a:rPr>
-              <a:t>•  Estructura un objeto STIX (indicator + malware + relationship) o crea un evento en MISP con TLP y tags.</a:t>
+              <a:t>•  Término — Definición concisa</a:t>
+            </a:r>
+          </a:p>
+          <a:p>
+            <a:pPr>
+              <a:spcAft>
+                <a:spcPts val="600"/>
+              </a:spcAft>
+            </a:pPr>
+            <a:r>
+              <a:rPr sz="1500">
+                <a:solidFill>
+                  <a:srgbClr val="22282E"/>
+                </a:solidFill>
+              </a:rPr>
+              <a:t>•  Threat intelligence (CTI) — Conocimiento accionable sobre los adversarios</a:t>
+            </a:r>
+          </a:p>
+          <a:p>
+            <a:pPr>
+              <a:spcAft>
+                <a:spcPts val="600"/>
+              </a:spcAft>
+            </a:pPr>
+            <a:r>
+              <a:rPr sz="1500">
+                <a:solidFill>
+                  <a:srgbClr val="22282E"/>
+                </a:solidFill>
+              </a:rPr>
+              <a:t>•  Dato → información → inteligencia — Jerarquía de valor de la CTI</a:t>
+            </a:r>
+          </a:p>
+          <a:p>
+            <a:pPr>
+              <a:spcAft>
+                <a:spcPts val="600"/>
+              </a:spcAft>
+            </a:pPr>
+            <a:r>
+              <a:rPr sz="1500">
+                <a:solidFill>
+                  <a:srgbClr val="22282E"/>
+                </a:solidFill>
+              </a:rPr>
+              <a:t>•  Pyramid of Pain — Clasifica IOCs por cuánto cuesta cambiarlos</a:t>
+            </a:r>
+          </a:p>
+          <a:p>
+            <a:pPr>
+              <a:spcAft>
+                <a:spcPts val="600"/>
+              </a:spcAft>
+            </a:pPr>
+            <a:r>
+              <a:rPr sz="1500">
+                <a:solidFill>
+                  <a:srgbClr val="22282E"/>
+                </a:solidFill>
+              </a:rPr>
+              <a:t>•  IOC — Indicador de compromiso (hash, IP, dominio)</a:t>
+            </a:r>
+          </a:p>
+          <a:p>
+            <a:pPr>
+              <a:spcAft>
+                <a:spcPts val="600"/>
+              </a:spcAft>
+            </a:pPr>
+            <a:r>
+              <a:rPr sz="1500">
+                <a:solidFill>
+                  <a:srgbClr val="22282E"/>
+                </a:solidFill>
+              </a:rPr>
+              <a:t>•  TTP — Tácticas, técnicas y procedimientos; lo más caro de cambiar</a:t>
+            </a:r>
+          </a:p>
+          <a:p>
+            <a:pPr>
+              <a:spcAft>
+                <a:spcPts val="600"/>
+              </a:spcAft>
+            </a:pPr>
+            <a:r>
+              <a:rPr sz="1500">
+                <a:solidFill>
+                  <a:srgbClr val="22282E"/>
+                </a:solidFill>
+              </a:rPr>
+              <a:t>•  Hash / IP — IOCs triviales de cambiar (base de la pirámide)</a:t>
             </a:r>
           </a:p>
         </p:txBody>
@@ -4509,7 +4900,7 @@
                   <a:srgbClr val="0B3D2E"/>
                 </a:solidFill>
               </a:rPr>
-              <a:t>✍️ Ejercicios</a:t>
+              <a:t>🧰 Herramientas y preparación</a:t>
             </a:r>
           </a:p>
         </p:txBody>
@@ -4547,82 +4938,52 @@
                   <a:srgbClr val="22282E"/>
                 </a:solidFill>
               </a:rPr>
-              <a:t>•  Ordena 8 IOCs en la Pyramid of Pain y justifica.</a:t>
-            </a:r>
-          </a:p>
-          <a:p>
-            <a:pPr>
-              <a:spcAft>
-                <a:spcPts val="600"/>
-              </a:spcAft>
-            </a:pPr>
-            <a:r>
-              <a:rPr sz="1500">
-                <a:solidFill>
-                  <a:srgbClr val="22282E"/>
-                </a:solidFill>
-              </a:rPr>
-              <a:t>•  Pivotea de un dominio a muestras relacionadas y documenta el grafo.</a:t>
-            </a:r>
-          </a:p>
-          <a:p>
-            <a:pPr>
-              <a:spcAft>
-                <a:spcPts val="600"/>
-              </a:spcAft>
-            </a:pPr>
-            <a:r>
-              <a:rPr sz="1500">
-                <a:solidFill>
-                  <a:srgbClr val="22282E"/>
-                </a:solidFill>
-              </a:rPr>
-              <a:t>•  Rellena un Diamond Model de un caso real.</a:t>
-            </a:r>
-          </a:p>
-          <a:p>
-            <a:pPr>
-              <a:spcAft>
-                <a:spcPts val="600"/>
-              </a:spcAft>
-            </a:pPr>
-            <a:r>
-              <a:rPr sz="1500">
-                <a:solidFill>
-                  <a:srgbClr val="22282E"/>
-                </a:solidFill>
-              </a:rPr>
-              <a:t>•  Exporta una capa de ATT&amp;CK Navigator para una familia.</a:t>
-            </a:r>
-          </a:p>
-          <a:p>
-            <a:pPr>
-              <a:spcAft>
-                <a:spcPts val="600"/>
-              </a:spcAft>
-            </a:pPr>
-            <a:r>
-              <a:rPr sz="1500">
-                <a:solidFill>
-                  <a:srgbClr val="22282E"/>
-                </a:solidFill>
-              </a:rPr>
-              <a:t>•  Crea un evento MISP con IOCs, TTPs y TLP.</a:t>
-            </a:r>
-          </a:p>
-          <a:p>
-            <a:pPr>
-              <a:spcAft>
-                <a:spcPts val="600"/>
-              </a:spcAft>
-            </a:pPr>
-            <a:r>
-              <a:rPr sz="1500">
-                <a:solidFill>
-                  <a:srgbClr val="22282E"/>
-                </a:solidFill>
-              </a:rPr>
-              <a:t>•  Redacta una hipótesis de atribución con confianza calibrada.</a:t>
+              <a:t>•  VirusTotal (pivoteo), MalwareBazaar, URLhaus, ThreatFox (abuse.ch).</a:t>
+            </a:r>
+          </a:p>
+          <a:p>
+            <a:pPr>
+              <a:spcAft>
+                <a:spcPts val="600"/>
+              </a:spcAft>
+            </a:pPr>
+            <a:r>
+              <a:rPr sz="1500">
+                <a:solidFill>
+                  <a:srgbClr val="22282E"/>
+                </a:solidFill>
+              </a:rPr>
+              <a:t>•  MISP para almacenar y compartir; STIX2 (Python) para estructurar.</a:t>
+            </a:r>
+          </a:p>
+          <a:p>
+            <a:pPr>
+              <a:spcAft>
+                <a:spcPts val="600"/>
+              </a:spcAft>
+            </a:pPr>
+            <a:r>
+              <a:rPr sz="1500">
+                <a:solidFill>
+                  <a:srgbClr val="22282E"/>
+                </a:solidFill>
+              </a:rPr>
+              <a:t>•  MITRE ATT&amp;CK Navigator para mapear TTPs.</a:t>
+            </a:r>
+          </a:p>
+          <a:p>
+            <a:pPr>
+              <a:spcAft>
+                <a:spcPts val="600"/>
+              </a:spcAft>
+            </a:pPr>
+            <a:r>
+              <a:rPr sz="1500">
+                <a:solidFill>
+                  <a:srgbClr val="22282E"/>
+                </a:solidFill>
+              </a:rPr>
+              <a:t>•  Passive DNS / WHOIS para pivoteo de infraestructura.</a:t>
             </a:r>
           </a:p>
         </p:txBody>
@@ -4673,7 +5034,7 @@
                   <a:srgbClr val="0B3D2E"/>
                 </a:solidFill>
               </a:rPr>
-              <a:t>📝 Reto verificable</a:t>
+              <a:t>🧪 Laboratorio guiado</a:t>
             </a:r>
           </a:p>
         </p:txBody>
@@ -4711,22 +5072,97 @@
                   <a:srgbClr val="22282E"/>
                 </a:solidFill>
               </a:rPr>
-              <a:t>•  A partir de una muestra, entrega un paquete de inteligencia: IOCs clasificados por la pirámide, capa ATT&amp;CK, grafo de pivoteo con al menos 2 relaciones nuevas y una evaluación de atribución con nivel de confianza.</a:t>
-            </a:r>
-          </a:p>
-          <a:p>
-            <a:pPr>
-              <a:spcAft>
-                <a:spcPts val="600"/>
-              </a:spcAft>
-            </a:pPr>
-            <a:r>
-              <a:rPr sz="1500">
-                <a:solidFill>
-                  <a:srgbClr val="22282E"/>
-                </a:solidFill>
-              </a:rPr>
-              <a:t>•  Criterio de aceptación: el paquete incluye al menos dos artefactos relacionados descubiertos por pivoteo (no presentes en la muestra inicial) y una atribución con confianza explícita y evidencia, no una afirmación categórica.</a:t>
+              <a:t>•  Parte de una muestra ya analizada. Reúne sus IOCs: hashes, dominios/IPs C2, mutex, rutas, certificados TLS.</a:t>
+            </a:r>
+          </a:p>
+          <a:p>
+            <a:pPr>
+              <a:spcAft>
+                <a:spcPts val="600"/>
+              </a:spcAft>
+            </a:pPr>
+            <a:r>
+              <a:rPr sz="1500">
+                <a:solidFill>
+                  <a:srgbClr val="22282E"/>
+                </a:solidFill>
+              </a:rPr>
+              <a:t>•  Clasifícalos con la Pyramid of Pain y anota cuáles son volátiles (hash/IP) y cuáles duraderos (TTPs, herramientas).</a:t>
+            </a:r>
+          </a:p>
+          <a:p>
+            <a:pPr>
+              <a:spcAft>
+                <a:spcPts val="600"/>
+              </a:spcAft>
+            </a:pPr>
+            <a:r>
+              <a:rPr sz="1500">
+                <a:solidFill>
+                  <a:srgbClr val="22282E"/>
+                </a:solidFill>
+              </a:rPr>
+              <a:t>•  Pivotea en VirusTotal/ThreatFox: desde un dominio C2 encuentra otras muestras que lo contactan; desde un imphash halla binarios similares. Documenta las relaciones.</a:t>
+            </a:r>
+          </a:p>
+          <a:p>
+            <a:pPr>
+              <a:spcAft>
+                <a:spcPts val="600"/>
+              </a:spcAft>
+            </a:pPr>
+            <a:r>
+              <a:rPr sz="1500">
+                <a:solidFill>
+                  <a:srgbClr val="22282E"/>
+                </a:solidFill>
+              </a:rPr>
+              <a:t>•  Usa passive DNS/WHOIS para expandir la infraestructura (dominios hermanos, ASN, patrones de registro).</a:t>
+            </a:r>
+          </a:p>
+          <a:p>
+            <a:pPr>
+              <a:spcAft>
+                <a:spcPts val="600"/>
+              </a:spcAft>
+            </a:pPr>
+            <a:r>
+              <a:rPr sz="1500">
+                <a:solidFill>
+                  <a:srgbClr val="22282E"/>
+                </a:solidFill>
+              </a:rPr>
+              <a:t>•  Construye un Diamond Model del evento: adversario (hipótesis), infraestructura, capacidad (la muestra), víctima.</a:t>
+            </a:r>
+          </a:p>
+          <a:p>
+            <a:pPr>
+              <a:spcAft>
+                <a:spcPts val="600"/>
+              </a:spcAft>
+            </a:pPr>
+            <a:r>
+              <a:rPr sz="1500">
+                <a:solidFill>
+                  <a:srgbClr val="22282E"/>
+                </a:solidFill>
+              </a:rPr>
+              <a:t>•  Mapea las TTPs al ATT&amp;CK Navigator y exporta la capa.</a:t>
+            </a:r>
+          </a:p>
+          <a:p>
+            <a:pPr>
+              <a:spcAft>
+                <a:spcPts val="600"/>
+              </a:spcAft>
+            </a:pPr>
+            <a:r>
+              <a:rPr sz="1500">
+                <a:solidFill>
+                  <a:srgbClr val="22282E"/>
+                </a:solidFill>
+              </a:rPr>
+              <a:t>•  Estructura un objeto STIX (indicator + malware + relationship) o crea un evento en MISP con TLP y tags.</a:t>
             </a:r>
           </a:p>
         </p:txBody>
